--- a/decks/triple-light/triple-light_ch6_exam-skills.pptx
+++ b/decks/triple-light/triple-light_ch6_exam-skills.pptx
@@ -125,29 +125,29 @@
   <p:extLst>
     <p:ext uri="{521415D9-36F7-43E2-AB2F-B90AF26B5E84}">
       <p14:sectionLst xmlns:p14="http://schemas.microsoft.com/office/powerpoint/2010/main">
-        <p14:section name="Opening" id="{aa7a36d8-5b1a-6f16-78e5-93ed8a4538ec}">
+        <p14:section name="Opening" id="{96861837-066f-dda8-ffa2-2a75ec4f8957}">
           <p14:sldIdLst>
             <p14:sldId id="256"/>
           </p14:sldIdLst>
         </p14:section>
-        <p14:section name="Gate" id="{abf8420e-b890-d1a2-1011-ccad1fe5a2af}">
+        <p14:section name="Gate" id="{163042a6-0540-7924-d55e-d3a01e63e6eb}">
           <p14:sldIdLst>
             <p14:sldId id="257"/>
             <p14:sldId id="258"/>
           </p14:sldIdLst>
         </p14:section>
-        <p14:section name="Pre-teach" id="{bb1e79a1-920d-cb21-e644-92af7ee51223}">
+        <p14:section name="Pre-teach" id="{971352a3-03dd-2ad6-db08-073a580678a7}">
           <p14:sldIdLst>
             <p14:sldId id="259"/>
           </p14:sldIdLst>
         </p14:section>
-        <p14:section name="Read-along" id="{d0b4cf90-ce30-01ef-c575-ae1775a28e02}">
+        <p14:section name="Read-along" id="{06b96e3a-d000-dba3-b84d-66d960fa3eb7}">
           <p14:sldIdLst>
             <p14:sldId id="260"/>
             <p14:sldId id="261"/>
           </p14:sldIdLst>
         </p14:section>
-        <p14:section name="Teach" id="{3e19a70c-6ed4-ca97-754a-72f604eb4ebb}">
+        <p14:section name="Teach" id="{2d2d5cf5-d3a5-c4d9-99e7-c43e81d87b0e}">
           <p14:sldIdLst>
             <p14:sldId id="262"/>
             <p14:sldId id="263"/>
@@ -155,19 +155,19 @@
             <p14:sldId id="265"/>
           </p14:sldIdLst>
         </p14:section>
-        <p14:section name="Routes" id="{fed9d2d1-ef78-a65e-10dd-c1374b7fa92e}">
+        <p14:section name="Routes" id="{0c397c0e-fe65-cf9b-3ce2-0e316f7aefb6}">
           <p14:sldIdLst>
             <p14:sldId id="266"/>
             <p14:sldId id="267"/>
             <p14:sldId id="268"/>
           </p14:sldIdLst>
         </p14:section>
-        <p14:section name="Close" id="{80b12b4a-b92b-3178-fce2-b6d71ec1f188}">
+        <p14:section name="Close" id="{d063f911-4813-9e5f-a26b-03f9baf86196}">
           <p14:sldIdLst>
             <p14:sldId id="269"/>
           </p14:sldIdLst>
         </p14:section>
-        <p14:section name="Answers" id="{7722f171-dabb-d403-fd87-dfb6dfdd12e7}">
+        <p14:section name="Answers" id="{5ed78acb-8a62-24ae-4737-ee79aec25d20}">
           <p14:sldIdLst>
             <p14:sldId id="270"/>
             <p14:sldId id="271"/>
@@ -1603,7 +1603,7 @@
               <a:t>Do now — retrieval. Silent, no notes, no help: recall comes before any support. Give about four minutes.
 1. In a ray diagram, how should the normal be drawn?  →  A   As a dotted line at right angles to the surface where the ray hits
 2. The command word ___ asks you to give reasons, linked with because and so.  →  explain
-3. A pupil writes the answer to a magnification calculation as '2.5 cm'. What is wrong?  →  A   Magnification is a ratio and has no units
+3. A pupil writes the answer to a magnification calculation as '2.5 cm'. What is wrong?  →  C   Magnification is a ratio and has no units
 Circulate: who gets 3/3 (Stretch route), 2/3 (Core), 0–1 (Support)? Use this to route pupils later in the lesson.</a:t>
             </a:r>
             <a:endParaRPr lang="en-US" dirty="0"/>
@@ -1695,7 +1695,7 @@
               <a:t>Answers — pupils mark their own in a different colour, then hands up for 3/3, 2/3, 1/3.
 1. A   As a dotted line at right angles to the surface where the ray hits. The normal is a construction line at 90° to the surface at the point of incidence, drawn dotted. Every angle is measured from it.
 2. explain. 'Explain' asks why. 'Describe' asks what happens; 'state' asks for a short fact.
-3. A   Magnification is a ratio and has no units. Magnification is image height ÷ object height. The units cancel, so it has none.
+3. C   Magnification is a ratio and has no units. Magnification is image height ÷ object height. The units cancel, so it has none.
 Say the route each score points to: 3/3 Stretch, 2/3 Core, 0–1 Support. Pupils may choose to move up.</a:t>
             </a:r>
             <a:endParaRPr lang="en-US" dirty="0"/>
@@ -7295,7 +7295,7 @@
                 <a:ea typeface="Calibri" pitchFamily="34" charset="-122"/>
                 <a:cs typeface="Calibri" pitchFamily="34" charset="-120"/>
               </a:rPr>
-              <a:t>As a solid line along the surface</a:t>
+              <a:t>It is not needed if the angles are labelled</a:t>
             </a:r>
             <a:endParaRPr lang="en-US" sz="2400" dirty="0"/>
           </a:p>
@@ -7332,7 +7332,7 @@
                 <a:ea typeface="Calibri" pitchFamily="34" charset="-122"/>
                 <a:cs typeface="Calibri" pitchFamily="34" charset="-120"/>
               </a:rPr>
-              <a:t>As a curved line through the lens</a:t>
+              <a:t>As a solid line along the surface</a:t>
             </a:r>
             <a:endParaRPr lang="en-US" sz="2400" dirty="0"/>
           </a:p>
@@ -7369,7 +7369,7 @@
                 <a:ea typeface="Calibri" pitchFamily="34" charset="-122"/>
                 <a:cs typeface="Calibri" pitchFamily="34" charset="-120"/>
               </a:rPr>
-              <a:t>It is not needed if the angles are labelled</a:t>
+              <a:t>As a curved line through the lens</a:t>
             </a:r>
             <a:endParaRPr lang="en-US" sz="2400" dirty="0"/>
           </a:p>
@@ -10550,7 +10550,7 @@
                 <a:ea typeface="Calibri" pitchFamily="34" charset="-122"/>
                 <a:cs typeface="Calibri" pitchFamily="34" charset="-120"/>
               </a:rPr>
-              <a:t>As a solid line along the surface</a:t>
+              <a:t>It is not needed if the angles are labelled</a:t>
             </a:r>
             <a:endParaRPr lang="en-US" sz="1800" dirty="0"/>
           </a:p>
@@ -10587,7 +10587,7 @@
                 <a:ea typeface="Calibri" pitchFamily="34" charset="-122"/>
                 <a:cs typeface="Calibri" pitchFamily="34" charset="-120"/>
               </a:rPr>
-              <a:t>As a curved line through the lens</a:t>
+              <a:t>As a solid line along the surface</a:t>
             </a:r>
             <a:endParaRPr lang="en-US" sz="1800" dirty="0"/>
           </a:p>
@@ -10624,7 +10624,7 @@
                 <a:ea typeface="Calibri" pitchFamily="34" charset="-122"/>
                 <a:cs typeface="Calibri" pitchFamily="34" charset="-120"/>
               </a:rPr>
-              <a:t>It is not needed if the angles are labelled</a:t>
+              <a:t>As a curved line through the lens</a:t>
             </a:r>
             <a:endParaRPr lang="en-US" sz="1800" dirty="0"/>
           </a:p>
@@ -11026,7 +11026,7 @@
                 <a:ea typeface="Calibri" pitchFamily="34" charset="-122"/>
                 <a:cs typeface="Calibri" pitchFamily="34" charset="-120"/>
               </a:rPr>
-              <a:t>Magnification is a ratio and has no units</a:t>
+              <a:t>The answer should be in metres</a:t>
             </a:r>
             <a:endParaRPr lang="en-US" sz="1800" dirty="0"/>
           </a:p>
@@ -11100,7 +11100,7 @@
                 <a:ea typeface="Calibri" pitchFamily="34" charset="-122"/>
                 <a:cs typeface="Calibri" pitchFamily="34" charset="-120"/>
               </a:rPr>
-              <a:t>The answer should be in metres</a:t>
+              <a:t>Magnification is a ratio and has no units</a:t>
             </a:r>
             <a:endParaRPr lang="en-US" sz="1800" dirty="0"/>
           </a:p>
@@ -12038,7 +12038,7 @@
                 <a:ea typeface="Calibri" pitchFamily="34" charset="-122"/>
                 <a:cs typeface="Calibri" pitchFamily="34" charset="-120"/>
               </a:rPr>
-              <a:t>A   Magnification is a ratio and has no units</a:t>
+              <a:t>C   Magnification is a ratio and has no units</a:t>
             </a:r>
             <a:endParaRPr lang="en-US" sz="2200" dirty="0"/>
           </a:p>

--- a/decks/triple-light/triple-light_ch6_exam-skills.pptx
+++ b/decks/triple-light/triple-light_ch6_exam-skills.pptx
@@ -125,29 +125,29 @@
   <p:extLst>
     <p:ext uri="{521415D9-36F7-43E2-AB2F-B90AF26B5E84}">
       <p14:sectionLst xmlns:p14="http://schemas.microsoft.com/office/powerpoint/2010/main">
-        <p14:section name="Opening" id="{96861837-066f-dda8-ffa2-2a75ec4f8957}">
+        <p14:section name="Opening" id="{744530a8-82fa-f49e-08c1-c84ffa6a0314}">
           <p14:sldIdLst>
             <p14:sldId id="256"/>
           </p14:sldIdLst>
         </p14:section>
-        <p14:section name="Gate" id="{163042a6-0540-7924-d55e-d3a01e63e6eb}">
+        <p14:section name="Gate" id="{3c220d7a-5413-a5b3-9fb3-64c6b09c3edf}">
           <p14:sldIdLst>
             <p14:sldId id="257"/>
             <p14:sldId id="258"/>
           </p14:sldIdLst>
         </p14:section>
-        <p14:section name="Pre-teach" id="{971352a3-03dd-2ad6-db08-073a580678a7}">
+        <p14:section name="Pre-teach" id="{24e70816-ac24-ff8b-e06b-3b8deae85baf}">
           <p14:sldIdLst>
             <p14:sldId id="259"/>
           </p14:sldIdLst>
         </p14:section>
-        <p14:section name="Read-along" id="{06b96e3a-d000-dba3-b84d-66d960fa3eb7}">
+        <p14:section name="Read-along" id="{8f456574-4162-501a-63cb-0eb80ffb93f7}">
           <p14:sldIdLst>
             <p14:sldId id="260"/>
             <p14:sldId id="261"/>
           </p14:sldIdLst>
         </p14:section>
-        <p14:section name="Teach" id="{2d2d5cf5-d3a5-c4d9-99e7-c43e81d87b0e}">
+        <p14:section name="Teach" id="{5a1ed630-1cb9-62a7-00d6-cce7c86b2fda}">
           <p14:sldIdLst>
             <p14:sldId id="262"/>
             <p14:sldId id="263"/>
@@ -155,19 +155,19 @@
             <p14:sldId id="265"/>
           </p14:sldIdLst>
         </p14:section>
-        <p14:section name="Routes" id="{0c397c0e-fe65-cf9b-3ce2-0e316f7aefb6}">
+        <p14:section name="Routes" id="{7baf0b81-4f0b-8705-9303-b36bcc935fb4}">
           <p14:sldIdLst>
             <p14:sldId id="266"/>
             <p14:sldId id="267"/>
             <p14:sldId id="268"/>
           </p14:sldIdLst>
         </p14:section>
-        <p14:section name="Close" id="{d063f911-4813-9e5f-a26b-03f9baf86196}">
+        <p14:section name="Close" id="{a700608b-6e24-58b4-6ad0-f3ea9b468f15}">
           <p14:sldIdLst>
             <p14:sldId id="269"/>
           </p14:sldIdLst>
         </p14:section>
-        <p14:section name="Answers" id="{5ed78acb-8a62-24ae-4737-ee79aec25d20}">
+        <p14:section name="Answers" id="{072b6dc0-3c9f-d150-9816-e9d7a885adda}">
           <p14:sldIdLst>
             <p14:sldId id="270"/>
             <p14:sldId id="271"/>
